--- a/slides/2-5b_capnography_abnormal/2-5b_capnography_abnormal.pptx
+++ b/slides/2-5b_capnography_abnormal/2-5b_capnography_abnormal.pptx
@@ -4621,7 +4621,7 @@
             <a:r>
               <a:rPr lang="ja-JP" altLang="en-US" sz="2800" b="1" dirty="0">
                 <a:solidFill>
-                  <a:srgbClr val="007C80"/>
+                  <a:srgbClr val="00A8AA"/>
                 </a:solidFill>
                 <a:latin typeface="メイリオ" pitchFamily="34" charset="0"/>
                 <a:ea typeface="メイリオ" pitchFamily="34" charset="-122"/>
@@ -4653,7 +4653,7 @@
             <a:r>
               <a:rPr lang="ja-JP" altLang="en-US" sz="2800" b="1" dirty="0">
                 <a:solidFill>
-                  <a:srgbClr val="007C80"/>
+                  <a:srgbClr val="00A8AA"/>
                 </a:solidFill>
                 <a:latin typeface="メイリオ" pitchFamily="34" charset="0"/>
                 <a:ea typeface="メイリオ" pitchFamily="34" charset="-122"/>
@@ -4717,7 +4717,7 @@
             <a:r>
               <a:rPr lang="ja-JP" altLang="en-US" sz="2800" b="1" dirty="0">
                 <a:solidFill>
-                  <a:srgbClr val="007C80"/>
+                  <a:srgbClr val="00A8AA"/>
                 </a:solidFill>
                 <a:latin typeface="メイリオ" pitchFamily="34" charset="0"/>
                 <a:ea typeface="メイリオ" pitchFamily="34" charset="-122"/>
@@ -5470,7 +5470,7 @@
             <a:r>
               <a:rPr lang="ja-JP" altLang="en-US" sz="2800" b="1" dirty="0">
                 <a:solidFill>
-                  <a:srgbClr val="007C80"/>
+                  <a:srgbClr val="00A8AA"/>
                 </a:solidFill>
                 <a:latin typeface="メイリオ" pitchFamily="34" charset="0"/>
                 <a:ea typeface="メイリオ" pitchFamily="34" charset="-122"/>
@@ -7258,7 +7258,7 @@
             <a:r>
               <a:rPr lang="ja-JP" altLang="en-US" sz="2400" b="1" dirty="0">
                 <a:solidFill>
-                  <a:srgbClr val="007C80"/>
+                  <a:srgbClr val="00A8AA"/>
                 </a:solidFill>
                 <a:latin typeface="メイリオ" pitchFamily="34" charset="0"/>
                 <a:ea typeface="メイリオ" pitchFamily="34" charset="-122"/>
@@ -10614,7 +10614,7 @@
             <a:r>
               <a:rPr lang="ja-JP" altLang="en-US" sz="2800" b="1" dirty="0">
                 <a:solidFill>
-                  <a:srgbClr val="007C80"/>
+                  <a:srgbClr val="00A8AA"/>
                 </a:solidFill>
                 <a:latin typeface="メイリオ" pitchFamily="34" charset="0"/>
                 <a:ea typeface="メイリオ" pitchFamily="34" charset="-122"/>
@@ -11635,7 +11635,7 @@
             <a:r>
               <a:rPr lang="ja-JP" altLang="en-US" sz="2400" b="1" dirty="0">
                 <a:solidFill>
-                  <a:srgbClr val="007C80"/>
+                  <a:srgbClr val="00A8AA"/>
                 </a:solidFill>
                 <a:latin typeface="メイリオ" pitchFamily="34" charset="0"/>
                 <a:ea typeface="メイリオ" pitchFamily="34" charset="-122"/>

--- a/slides/2-5b_capnography_abnormal/2-5b_capnography_abnormal.pptx
+++ b/slides/2-5b_capnography_abnormal/2-5b_capnography_abnormal.pptx
@@ -2261,7 +2261,7 @@
           </a:xfrm>
           <a:prstGeom prst="roundRect">
             <a:avLst>
-              <a:gd name="adj" fmla="val 15625"/>
+              <a:gd name="adj" fmla="val 7813"/>
             </a:avLst>
           </a:prstGeom>
           <a:solidFill>
@@ -2270,14 +2270,14 @@
           <a:ln/>
         </p:spPr>
         <p:txBody>
-          <a:bodyPr wrap="square" lIns="0" tIns="0" rIns="0" bIns="0" rtlCol="0" anchor="ctr"/>
+          <a:bodyPr wrap="none" lIns="0" tIns="0" rIns="0" bIns="0" rtlCol="0" anchor="ctr"/>
           <a:lstStyle/>
           <a:p>
             <a:pPr algn="ctr" indent="0" marL="0">
               <a:buNone/>
             </a:pPr>
             <a:r>
-              <a:rPr lang="ja-JP" altLang="en-US" sz="1100" dirty="0">
+              <a:rPr lang="ja-JP" altLang="en-US" sz="1050" dirty="0">
                 <a:solidFill>
                   <a:srgbClr val="404040"/>
                 </a:solidFill>
@@ -2287,7 +2287,7 @@
               </a:rPr>
               <a:t>順番</a:t>
             </a:r>
-            <a:endParaRPr lang="ja-JP" sz="1100" dirty="0"/>
+            <a:endParaRPr lang="ja-JP" sz="1050" dirty="0"/>
           </a:p>
         </p:txBody>
       </p:sp>
@@ -2304,7 +2304,7 @@
           </a:xfrm>
           <a:prstGeom prst="roundRect">
             <a:avLst>
-              <a:gd name="adj" fmla="val 15625"/>
+              <a:gd name="adj" fmla="val 7813"/>
             </a:avLst>
           </a:prstGeom>
           <a:solidFill>
@@ -2313,14 +2313,14 @@
           <a:ln/>
         </p:spPr>
         <p:txBody>
-          <a:bodyPr wrap="square" lIns="0" tIns="0" rIns="0" bIns="0" rtlCol="0" anchor="ctr"/>
+          <a:bodyPr wrap="none" lIns="0" tIns="0" rIns="0" bIns="0" rtlCol="0" anchor="ctr"/>
           <a:lstStyle/>
           <a:p>
             <a:pPr algn="ctr" indent="0" marL="0">
               <a:buNone/>
             </a:pPr>
             <a:r>
-              <a:rPr lang="ja-JP" altLang="en-US" sz="1100" dirty="0">
+              <a:rPr lang="ja-JP" altLang="en-US" sz="1050" dirty="0">
                 <a:solidFill>
                   <a:srgbClr val="404040"/>
                 </a:solidFill>
@@ -2330,14 +2330,14 @@
               </a:rPr>
               <a:t>消える・</a:t>
             </a:r>
-            <a:endParaRPr lang="ja-JP" sz="1100" dirty="0"/>
+            <a:endParaRPr lang="ja-JP" sz="1050" dirty="0"/>
           </a:p>
           <a:p>
             <a:pPr algn="ctr" indent="0" marL="0">
               <a:buNone/>
             </a:pPr>
             <a:r>
-              <a:rPr lang="ja-JP" altLang="en-US" sz="1100" dirty="0">
+              <a:rPr lang="ja-JP" altLang="en-US" sz="1050" dirty="0">
                 <a:solidFill>
                   <a:srgbClr val="404040"/>
                 </a:solidFill>
@@ -2347,7 +2347,7 @@
               </a:rPr>
               <a:t>下がる</a:t>
             </a:r>
-            <a:endParaRPr lang="ja-JP" sz="1100" dirty="0"/>
+            <a:endParaRPr lang="ja-JP" sz="1050" dirty="0"/>
           </a:p>
         </p:txBody>
       </p:sp>
@@ -2364,7 +2364,7 @@
           </a:xfrm>
           <a:prstGeom prst="roundRect">
             <a:avLst>
-              <a:gd name="adj" fmla="val 15625"/>
+              <a:gd name="adj" fmla="val 7813"/>
             </a:avLst>
           </a:prstGeom>
           <a:solidFill>
@@ -2373,14 +2373,14 @@
           <a:ln/>
         </p:spPr>
         <p:txBody>
-          <a:bodyPr wrap="square" lIns="0" tIns="0" rIns="0" bIns="0" rtlCol="0" anchor="ctr"/>
+          <a:bodyPr wrap="none" lIns="0" tIns="0" rIns="0" bIns="0" rtlCol="0" anchor="ctr"/>
           <a:lstStyle/>
           <a:p>
             <a:pPr algn="ctr" indent="0" marL="0">
               <a:buNone/>
             </a:pPr>
             <a:r>
-              <a:rPr lang="ja-JP" altLang="en-US" sz="1100" dirty="0">
+              <a:rPr lang="ja-JP" altLang="en-US" sz="1050" dirty="0">
                 <a:solidFill>
                   <a:srgbClr val="404040"/>
                 </a:solidFill>
@@ -2390,7 +2390,7 @@
               </a:rPr>
               <a:t>上がる</a:t>
             </a:r>
-            <a:endParaRPr lang="ja-JP" sz="1100" dirty="0"/>
+            <a:endParaRPr lang="ja-JP" sz="1050" dirty="0"/>
           </a:p>
         </p:txBody>
       </p:sp>
@@ -2407,7 +2407,7 @@
           </a:xfrm>
           <a:prstGeom prst="roundRect">
             <a:avLst>
-              <a:gd name="adj" fmla="val 15625"/>
+              <a:gd name="adj" fmla="val 7813"/>
             </a:avLst>
           </a:prstGeom>
           <a:solidFill>
@@ -2416,14 +2416,14 @@
           <a:ln/>
         </p:spPr>
         <p:txBody>
-          <a:bodyPr wrap="square" lIns="0" tIns="0" rIns="0" bIns="0" rtlCol="0" anchor="ctr"/>
+          <a:bodyPr wrap="none" lIns="0" tIns="0" rIns="0" bIns="0" rtlCol="0" anchor="ctr"/>
           <a:lstStyle/>
           <a:p>
             <a:pPr algn="ctr" indent="0" marL="0">
               <a:buNone/>
             </a:pPr>
             <a:r>
-              <a:rPr lang="ja-JP" altLang="en-US" sz="1100" dirty="0">
+              <a:rPr lang="ja-JP" altLang="en-US" sz="1050" dirty="0">
                 <a:solidFill>
                   <a:srgbClr val="404040"/>
                 </a:solidFill>
@@ -2433,7 +2433,7 @@
               </a:rPr>
               <a:t>形</a:t>
             </a:r>
-            <a:endParaRPr lang="ja-JP" sz="1100" dirty="0"/>
+            <a:endParaRPr lang="ja-JP" sz="1050" dirty="0"/>
           </a:p>
         </p:txBody>
       </p:sp>
@@ -2450,7 +2450,7 @@
           </a:xfrm>
           <a:prstGeom prst="roundRect">
             <a:avLst>
-              <a:gd name="adj" fmla="val 15625"/>
+              <a:gd name="adj" fmla="val 7813"/>
             </a:avLst>
           </a:prstGeom>
           <a:solidFill>
@@ -2459,14 +2459,14 @@
           <a:ln/>
         </p:spPr>
         <p:txBody>
-          <a:bodyPr wrap="square" lIns="0" tIns="0" rIns="0" bIns="0" rtlCol="0" anchor="ctr"/>
+          <a:bodyPr wrap="none" lIns="0" tIns="0" rIns="0" bIns="0" rtlCol="0" anchor="ctr"/>
           <a:lstStyle/>
           <a:p>
             <a:pPr algn="ctr" indent="0" marL="0">
               <a:buNone/>
             </a:pPr>
             <a:r>
-              <a:rPr lang="ja-JP" altLang="en-US" sz="1100" b="1" dirty="0">
+              <a:rPr lang="ja-JP" altLang="en-US" sz="1050" b="1" dirty="0">
                 <a:solidFill>
                   <a:srgbClr val="FFFFFF"/>
                 </a:solidFill>
@@ -2476,7 +2476,7 @@
               </a:rPr>
               <a:t>まとめ</a:t>
             </a:r>
-            <a:endParaRPr lang="ja-JP" sz="1100" dirty="0"/>
+            <a:endParaRPr lang="ja-JP" sz="1050" dirty="0"/>
           </a:p>
         </p:txBody>
       </p:sp>
@@ -4244,7 +4244,7 @@
           </a:xfrm>
           <a:prstGeom prst="roundRect">
             <a:avLst>
-              <a:gd name="adj" fmla="val 15625"/>
+              <a:gd name="adj" fmla="val 7813"/>
             </a:avLst>
           </a:prstGeom>
           <a:solidFill>
@@ -4253,14 +4253,14 @@
           <a:ln/>
         </p:spPr>
         <p:txBody>
-          <a:bodyPr wrap="square" lIns="0" tIns="0" rIns="0" bIns="0" rtlCol="0" anchor="ctr"/>
+          <a:bodyPr wrap="none" lIns="0" tIns="0" rIns="0" bIns="0" rtlCol="0" anchor="ctr"/>
           <a:lstStyle/>
           <a:p>
             <a:pPr algn="ctr" indent="0" marL="0">
               <a:buNone/>
             </a:pPr>
             <a:r>
-              <a:rPr lang="ja-JP" altLang="en-US" sz="1100" dirty="0">
+              <a:rPr lang="ja-JP" altLang="en-US" sz="1050" dirty="0">
                 <a:solidFill>
                   <a:srgbClr val="404040"/>
                 </a:solidFill>
@@ -4270,7 +4270,7 @@
               </a:rPr>
               <a:t>順番</a:t>
             </a:r>
-            <a:endParaRPr lang="ja-JP" sz="1100" dirty="0"/>
+            <a:endParaRPr lang="ja-JP" sz="1050" dirty="0"/>
           </a:p>
         </p:txBody>
       </p:sp>
@@ -4287,7 +4287,7 @@
           </a:xfrm>
           <a:prstGeom prst="roundRect">
             <a:avLst>
-              <a:gd name="adj" fmla="val 15625"/>
+              <a:gd name="adj" fmla="val 7813"/>
             </a:avLst>
           </a:prstGeom>
           <a:solidFill>
@@ -4296,14 +4296,14 @@
           <a:ln/>
         </p:spPr>
         <p:txBody>
-          <a:bodyPr wrap="square" lIns="0" tIns="0" rIns="0" bIns="0" rtlCol="0" anchor="ctr"/>
+          <a:bodyPr wrap="none" lIns="0" tIns="0" rIns="0" bIns="0" rtlCol="0" anchor="ctr"/>
           <a:lstStyle/>
           <a:p>
             <a:pPr algn="ctr" indent="0" marL="0">
               <a:buNone/>
             </a:pPr>
             <a:r>
-              <a:rPr lang="ja-JP" altLang="en-US" sz="1100" dirty="0">
+              <a:rPr lang="ja-JP" altLang="en-US" sz="1050" dirty="0">
                 <a:solidFill>
                   <a:srgbClr val="404040"/>
                 </a:solidFill>
@@ -4313,14 +4313,14 @@
               </a:rPr>
               <a:t>消える・</a:t>
             </a:r>
-            <a:endParaRPr lang="ja-JP" sz="1100" dirty="0"/>
+            <a:endParaRPr lang="ja-JP" sz="1050" dirty="0"/>
           </a:p>
           <a:p>
             <a:pPr algn="ctr" indent="0" marL="0">
               <a:buNone/>
             </a:pPr>
             <a:r>
-              <a:rPr lang="ja-JP" altLang="en-US" sz="1100" dirty="0">
+              <a:rPr lang="ja-JP" altLang="en-US" sz="1050" dirty="0">
                 <a:solidFill>
                   <a:srgbClr val="404040"/>
                 </a:solidFill>
@@ -4330,7 +4330,7 @@
               </a:rPr>
               <a:t>下がる</a:t>
             </a:r>
-            <a:endParaRPr lang="ja-JP" sz="1100" dirty="0"/>
+            <a:endParaRPr lang="ja-JP" sz="1050" dirty="0"/>
           </a:p>
         </p:txBody>
       </p:sp>
@@ -4347,7 +4347,7 @@
           </a:xfrm>
           <a:prstGeom prst="roundRect">
             <a:avLst>
-              <a:gd name="adj" fmla="val 15625"/>
+              <a:gd name="adj" fmla="val 7813"/>
             </a:avLst>
           </a:prstGeom>
           <a:solidFill>
@@ -4356,14 +4356,14 @@
           <a:ln/>
         </p:spPr>
         <p:txBody>
-          <a:bodyPr wrap="square" lIns="0" tIns="0" rIns="0" bIns="0" rtlCol="0" anchor="ctr"/>
+          <a:bodyPr wrap="none" lIns="0" tIns="0" rIns="0" bIns="0" rtlCol="0" anchor="ctr"/>
           <a:lstStyle/>
           <a:p>
             <a:pPr algn="ctr" indent="0" marL="0">
               <a:buNone/>
             </a:pPr>
             <a:r>
-              <a:rPr lang="ja-JP" altLang="en-US" sz="1100" dirty="0">
+              <a:rPr lang="ja-JP" altLang="en-US" sz="1050" dirty="0">
                 <a:solidFill>
                   <a:srgbClr val="404040"/>
                 </a:solidFill>
@@ -4373,7 +4373,7 @@
               </a:rPr>
               <a:t>上がる</a:t>
             </a:r>
-            <a:endParaRPr lang="ja-JP" sz="1100" dirty="0"/>
+            <a:endParaRPr lang="ja-JP" sz="1050" dirty="0"/>
           </a:p>
         </p:txBody>
       </p:sp>
@@ -4390,7 +4390,7 @@
           </a:xfrm>
           <a:prstGeom prst="roundRect">
             <a:avLst>
-              <a:gd name="adj" fmla="val 15625"/>
+              <a:gd name="adj" fmla="val 7813"/>
             </a:avLst>
           </a:prstGeom>
           <a:solidFill>
@@ -4399,14 +4399,14 @@
           <a:ln/>
         </p:spPr>
         <p:txBody>
-          <a:bodyPr wrap="square" lIns="0" tIns="0" rIns="0" bIns="0" rtlCol="0" anchor="ctr"/>
+          <a:bodyPr wrap="none" lIns="0" tIns="0" rIns="0" bIns="0" rtlCol="0" anchor="ctr"/>
           <a:lstStyle/>
           <a:p>
             <a:pPr algn="ctr" indent="0" marL="0">
               <a:buNone/>
             </a:pPr>
             <a:r>
-              <a:rPr lang="ja-JP" altLang="en-US" sz="1100" dirty="0">
+              <a:rPr lang="ja-JP" altLang="en-US" sz="1050" dirty="0">
                 <a:solidFill>
                   <a:srgbClr val="404040"/>
                 </a:solidFill>
@@ -4416,7 +4416,7 @@
               </a:rPr>
               <a:t>形</a:t>
             </a:r>
-            <a:endParaRPr lang="ja-JP" sz="1100" dirty="0"/>
+            <a:endParaRPr lang="ja-JP" sz="1050" dirty="0"/>
           </a:p>
         </p:txBody>
       </p:sp>
@@ -4433,7 +4433,7 @@
           </a:xfrm>
           <a:prstGeom prst="roundRect">
             <a:avLst>
-              <a:gd name="adj" fmla="val 15625"/>
+              <a:gd name="adj" fmla="val 7813"/>
             </a:avLst>
           </a:prstGeom>
           <a:solidFill>
@@ -4442,14 +4442,14 @@
           <a:ln/>
         </p:spPr>
         <p:txBody>
-          <a:bodyPr wrap="square" lIns="0" tIns="0" rIns="0" bIns="0" rtlCol="0" anchor="ctr"/>
+          <a:bodyPr wrap="none" lIns="0" tIns="0" rIns="0" bIns="0" rtlCol="0" anchor="ctr"/>
           <a:lstStyle/>
           <a:p>
             <a:pPr algn="ctr" indent="0" marL="0">
               <a:buNone/>
             </a:pPr>
             <a:r>
-              <a:rPr lang="ja-JP" altLang="en-US" sz="1100" b="1" dirty="0">
+              <a:rPr lang="ja-JP" altLang="en-US" sz="1050" b="1" dirty="0">
                 <a:solidFill>
                   <a:srgbClr val="FFFFFF"/>
                 </a:solidFill>
@@ -4459,7 +4459,7 @@
               </a:rPr>
               <a:t>まとめ</a:t>
             </a:r>
-            <a:endParaRPr lang="ja-JP" sz="1100" dirty="0"/>
+            <a:endParaRPr lang="ja-JP" sz="1050" dirty="0"/>
           </a:p>
         </p:txBody>
       </p:sp>
@@ -4849,7 +4849,7 @@
           </a:xfrm>
           <a:prstGeom prst="roundRect">
             <a:avLst>
-              <a:gd name="adj" fmla="val 15625"/>
+              <a:gd name="adj" fmla="val 7813"/>
             </a:avLst>
           </a:prstGeom>
           <a:solidFill>
@@ -4858,14 +4858,14 @@
           <a:ln/>
         </p:spPr>
         <p:txBody>
-          <a:bodyPr wrap="square" lIns="0" tIns="0" rIns="0" bIns="0" rtlCol="0" anchor="ctr"/>
+          <a:bodyPr wrap="none" lIns="0" tIns="0" rIns="0" bIns="0" rtlCol="0" anchor="ctr"/>
           <a:lstStyle/>
           <a:p>
             <a:pPr algn="ctr" indent="0" marL="0">
               <a:buNone/>
             </a:pPr>
             <a:r>
-              <a:rPr lang="ja-JP" altLang="en-US" sz="1100" b="1" dirty="0">
+              <a:rPr lang="ja-JP" altLang="en-US" sz="1050" b="1" dirty="0">
                 <a:solidFill>
                   <a:srgbClr val="FFFFFF"/>
                 </a:solidFill>
@@ -4875,7 +4875,7 @@
               </a:rPr>
               <a:t>順番</a:t>
             </a:r>
-            <a:endParaRPr lang="ja-JP" sz="1100" dirty="0"/>
+            <a:endParaRPr lang="ja-JP" sz="1050" dirty="0"/>
           </a:p>
         </p:txBody>
       </p:sp>
@@ -4892,7 +4892,7 @@
           </a:xfrm>
           <a:prstGeom prst="roundRect">
             <a:avLst>
-              <a:gd name="adj" fmla="val 15625"/>
+              <a:gd name="adj" fmla="val 7813"/>
             </a:avLst>
           </a:prstGeom>
           <a:solidFill>
@@ -4901,14 +4901,14 @@
           <a:ln/>
         </p:spPr>
         <p:txBody>
-          <a:bodyPr wrap="square" lIns="0" tIns="0" rIns="0" bIns="0" rtlCol="0" anchor="ctr"/>
+          <a:bodyPr wrap="none" lIns="0" tIns="0" rIns="0" bIns="0" rtlCol="0" anchor="ctr"/>
           <a:lstStyle/>
           <a:p>
             <a:pPr algn="ctr" indent="0" marL="0">
               <a:buNone/>
             </a:pPr>
             <a:r>
-              <a:rPr lang="ja-JP" altLang="en-US" sz="1100" dirty="0">
+              <a:rPr lang="ja-JP" altLang="en-US" sz="1050" dirty="0">
                 <a:solidFill>
                   <a:srgbClr val="404040"/>
                 </a:solidFill>
@@ -4918,14 +4918,14 @@
               </a:rPr>
               <a:t>消える・</a:t>
             </a:r>
-            <a:endParaRPr lang="ja-JP" sz="1100" dirty="0"/>
+            <a:endParaRPr lang="ja-JP" sz="1050" dirty="0"/>
           </a:p>
           <a:p>
             <a:pPr algn="ctr" indent="0" marL="0">
               <a:buNone/>
             </a:pPr>
             <a:r>
-              <a:rPr lang="ja-JP" altLang="en-US" sz="1100" dirty="0">
+              <a:rPr lang="ja-JP" altLang="en-US" sz="1050" dirty="0">
                 <a:solidFill>
                   <a:srgbClr val="404040"/>
                 </a:solidFill>
@@ -4935,7 +4935,7 @@
               </a:rPr>
               <a:t>下がる</a:t>
             </a:r>
-            <a:endParaRPr lang="ja-JP" sz="1100" dirty="0"/>
+            <a:endParaRPr lang="ja-JP" sz="1050" dirty="0"/>
           </a:p>
         </p:txBody>
       </p:sp>
@@ -4952,7 +4952,7 @@
           </a:xfrm>
           <a:prstGeom prst="roundRect">
             <a:avLst>
-              <a:gd name="adj" fmla="val 15625"/>
+              <a:gd name="adj" fmla="val 7813"/>
             </a:avLst>
           </a:prstGeom>
           <a:solidFill>
@@ -4961,14 +4961,14 @@
           <a:ln/>
         </p:spPr>
         <p:txBody>
-          <a:bodyPr wrap="square" lIns="0" tIns="0" rIns="0" bIns="0" rtlCol="0" anchor="ctr"/>
+          <a:bodyPr wrap="none" lIns="0" tIns="0" rIns="0" bIns="0" rtlCol="0" anchor="ctr"/>
           <a:lstStyle/>
           <a:p>
             <a:pPr algn="ctr" indent="0" marL="0">
               <a:buNone/>
             </a:pPr>
             <a:r>
-              <a:rPr lang="ja-JP" altLang="en-US" sz="1100" dirty="0">
+              <a:rPr lang="ja-JP" altLang="en-US" sz="1050" dirty="0">
                 <a:solidFill>
                   <a:srgbClr val="404040"/>
                 </a:solidFill>
@@ -4978,7 +4978,7 @@
               </a:rPr>
               <a:t>上がる</a:t>
             </a:r>
-            <a:endParaRPr lang="ja-JP" sz="1100" dirty="0"/>
+            <a:endParaRPr lang="ja-JP" sz="1050" dirty="0"/>
           </a:p>
         </p:txBody>
       </p:sp>
@@ -4995,7 +4995,7 @@
           </a:xfrm>
           <a:prstGeom prst="roundRect">
             <a:avLst>
-              <a:gd name="adj" fmla="val 15625"/>
+              <a:gd name="adj" fmla="val 7813"/>
             </a:avLst>
           </a:prstGeom>
           <a:solidFill>
@@ -5004,14 +5004,14 @@
           <a:ln/>
         </p:spPr>
         <p:txBody>
-          <a:bodyPr wrap="square" lIns="0" tIns="0" rIns="0" bIns="0" rtlCol="0" anchor="ctr"/>
+          <a:bodyPr wrap="none" lIns="0" tIns="0" rIns="0" bIns="0" rtlCol="0" anchor="ctr"/>
           <a:lstStyle/>
           <a:p>
             <a:pPr algn="ctr" indent="0" marL="0">
               <a:buNone/>
             </a:pPr>
             <a:r>
-              <a:rPr lang="ja-JP" altLang="en-US" sz="1100" dirty="0">
+              <a:rPr lang="ja-JP" altLang="en-US" sz="1050" dirty="0">
                 <a:solidFill>
                   <a:srgbClr val="404040"/>
                 </a:solidFill>
@@ -5021,7 +5021,7 @@
               </a:rPr>
               <a:t>形</a:t>
             </a:r>
-            <a:endParaRPr lang="ja-JP" sz="1100" dirty="0"/>
+            <a:endParaRPr lang="ja-JP" sz="1050" dirty="0"/>
           </a:p>
         </p:txBody>
       </p:sp>
@@ -5038,7 +5038,7 @@
           </a:xfrm>
           <a:prstGeom prst="roundRect">
             <a:avLst>
-              <a:gd name="adj" fmla="val 15625"/>
+              <a:gd name="adj" fmla="val 7813"/>
             </a:avLst>
           </a:prstGeom>
           <a:solidFill>
@@ -5047,14 +5047,14 @@
           <a:ln/>
         </p:spPr>
         <p:txBody>
-          <a:bodyPr wrap="square" lIns="0" tIns="0" rIns="0" bIns="0" rtlCol="0" anchor="ctr"/>
+          <a:bodyPr wrap="none" lIns="0" tIns="0" rIns="0" bIns="0" rtlCol="0" anchor="ctr"/>
           <a:lstStyle/>
           <a:p>
             <a:pPr algn="ctr" indent="0" marL="0">
               <a:buNone/>
             </a:pPr>
             <a:r>
-              <a:rPr lang="ja-JP" altLang="en-US" sz="1100" dirty="0">
+              <a:rPr lang="ja-JP" altLang="en-US" sz="1050" dirty="0">
                 <a:solidFill>
                   <a:srgbClr val="404040"/>
                 </a:solidFill>
@@ -5064,7 +5064,7 @@
               </a:rPr>
               <a:t>まとめ</a:t>
             </a:r>
-            <a:endParaRPr lang="ja-JP" sz="1100" dirty="0"/>
+            <a:endParaRPr lang="ja-JP" sz="1050" dirty="0"/>
           </a:p>
         </p:txBody>
       </p:sp>
@@ -5655,7 +5655,7 @@
           </a:xfrm>
           <a:prstGeom prst="roundRect">
             <a:avLst>
-              <a:gd name="adj" fmla="val 15625"/>
+              <a:gd name="adj" fmla="val 7813"/>
             </a:avLst>
           </a:prstGeom>
           <a:solidFill>
@@ -5664,14 +5664,14 @@
           <a:ln/>
         </p:spPr>
         <p:txBody>
-          <a:bodyPr wrap="square" lIns="0" tIns="0" rIns="0" bIns="0" rtlCol="0" anchor="ctr"/>
+          <a:bodyPr wrap="none" lIns="0" tIns="0" rIns="0" bIns="0" rtlCol="0" anchor="ctr"/>
           <a:lstStyle/>
           <a:p>
             <a:pPr algn="ctr" indent="0" marL="0">
               <a:buNone/>
             </a:pPr>
             <a:r>
-              <a:rPr lang="ja-JP" altLang="en-US" sz="1100" dirty="0">
+              <a:rPr lang="ja-JP" altLang="en-US" sz="1050" dirty="0">
                 <a:solidFill>
                   <a:srgbClr val="404040"/>
                 </a:solidFill>
@@ -5681,7 +5681,7 @@
               </a:rPr>
               <a:t>順番</a:t>
             </a:r>
-            <a:endParaRPr lang="ja-JP" sz="1100" dirty="0"/>
+            <a:endParaRPr lang="ja-JP" sz="1050" dirty="0"/>
           </a:p>
         </p:txBody>
       </p:sp>
@@ -5698,7 +5698,7 @@
           </a:xfrm>
           <a:prstGeom prst="roundRect">
             <a:avLst>
-              <a:gd name="adj" fmla="val 15625"/>
+              <a:gd name="adj" fmla="val 7813"/>
             </a:avLst>
           </a:prstGeom>
           <a:solidFill>
@@ -5707,14 +5707,14 @@
           <a:ln/>
         </p:spPr>
         <p:txBody>
-          <a:bodyPr wrap="square" lIns="0" tIns="0" rIns="0" bIns="0" rtlCol="0" anchor="ctr"/>
+          <a:bodyPr wrap="none" lIns="0" tIns="0" rIns="0" bIns="0" rtlCol="0" anchor="ctr"/>
           <a:lstStyle/>
           <a:p>
             <a:pPr algn="ctr" indent="0" marL="0">
               <a:buNone/>
             </a:pPr>
             <a:r>
-              <a:rPr lang="ja-JP" altLang="en-US" sz="1100" b="1" dirty="0">
+              <a:rPr lang="ja-JP" altLang="en-US" sz="1050" b="1" dirty="0">
                 <a:solidFill>
                   <a:srgbClr val="FFFFFF"/>
                 </a:solidFill>
@@ -5724,14 +5724,14 @@
               </a:rPr>
               <a:t>消える・</a:t>
             </a:r>
-            <a:endParaRPr lang="ja-JP" sz="1100" dirty="0"/>
+            <a:endParaRPr lang="ja-JP" sz="1050" dirty="0"/>
           </a:p>
           <a:p>
             <a:pPr algn="ctr" indent="0" marL="0">
               <a:buNone/>
             </a:pPr>
             <a:r>
-              <a:rPr lang="ja-JP" altLang="en-US" sz="1100" b="1" dirty="0">
+              <a:rPr lang="ja-JP" altLang="en-US" sz="1050" b="1" dirty="0">
                 <a:solidFill>
                   <a:srgbClr val="FFFFFF"/>
                 </a:solidFill>
@@ -5741,7 +5741,7 @@
               </a:rPr>
               <a:t>下がる</a:t>
             </a:r>
-            <a:endParaRPr lang="ja-JP" sz="1100" dirty="0"/>
+            <a:endParaRPr lang="ja-JP" sz="1050" dirty="0"/>
           </a:p>
         </p:txBody>
       </p:sp>
@@ -5758,7 +5758,7 @@
           </a:xfrm>
           <a:prstGeom prst="roundRect">
             <a:avLst>
-              <a:gd name="adj" fmla="val 15625"/>
+              <a:gd name="adj" fmla="val 7813"/>
             </a:avLst>
           </a:prstGeom>
           <a:solidFill>
@@ -5767,14 +5767,14 @@
           <a:ln/>
         </p:spPr>
         <p:txBody>
-          <a:bodyPr wrap="square" lIns="0" tIns="0" rIns="0" bIns="0" rtlCol="0" anchor="ctr"/>
+          <a:bodyPr wrap="none" lIns="0" tIns="0" rIns="0" bIns="0" rtlCol="0" anchor="ctr"/>
           <a:lstStyle/>
           <a:p>
             <a:pPr algn="ctr" indent="0" marL="0">
               <a:buNone/>
             </a:pPr>
             <a:r>
-              <a:rPr lang="ja-JP" altLang="en-US" sz="1100" dirty="0">
+              <a:rPr lang="ja-JP" altLang="en-US" sz="1050" dirty="0">
                 <a:solidFill>
                   <a:srgbClr val="404040"/>
                 </a:solidFill>
@@ -5784,7 +5784,7 @@
               </a:rPr>
               <a:t>上がる</a:t>
             </a:r>
-            <a:endParaRPr lang="ja-JP" sz="1100" dirty="0"/>
+            <a:endParaRPr lang="ja-JP" sz="1050" dirty="0"/>
           </a:p>
         </p:txBody>
       </p:sp>
@@ -5801,7 +5801,7 @@
           </a:xfrm>
           <a:prstGeom prst="roundRect">
             <a:avLst>
-              <a:gd name="adj" fmla="val 15625"/>
+              <a:gd name="adj" fmla="val 7813"/>
             </a:avLst>
           </a:prstGeom>
           <a:solidFill>
@@ -5810,14 +5810,14 @@
           <a:ln/>
         </p:spPr>
         <p:txBody>
-          <a:bodyPr wrap="square" lIns="0" tIns="0" rIns="0" bIns="0" rtlCol="0" anchor="ctr"/>
+          <a:bodyPr wrap="none" lIns="0" tIns="0" rIns="0" bIns="0" rtlCol="0" anchor="ctr"/>
           <a:lstStyle/>
           <a:p>
             <a:pPr algn="ctr" indent="0" marL="0">
               <a:buNone/>
             </a:pPr>
             <a:r>
-              <a:rPr lang="ja-JP" altLang="en-US" sz="1100" dirty="0">
+              <a:rPr lang="ja-JP" altLang="en-US" sz="1050" dirty="0">
                 <a:solidFill>
                   <a:srgbClr val="404040"/>
                 </a:solidFill>
@@ -5827,7 +5827,7 @@
               </a:rPr>
               <a:t>形</a:t>
             </a:r>
-            <a:endParaRPr lang="ja-JP" sz="1100" dirty="0"/>
+            <a:endParaRPr lang="ja-JP" sz="1050" dirty="0"/>
           </a:p>
         </p:txBody>
       </p:sp>
@@ -5844,7 +5844,7 @@
           </a:xfrm>
           <a:prstGeom prst="roundRect">
             <a:avLst>
-              <a:gd name="adj" fmla="val 15625"/>
+              <a:gd name="adj" fmla="val 7813"/>
             </a:avLst>
           </a:prstGeom>
           <a:solidFill>
@@ -5853,14 +5853,14 @@
           <a:ln/>
         </p:spPr>
         <p:txBody>
-          <a:bodyPr wrap="square" lIns="0" tIns="0" rIns="0" bIns="0" rtlCol="0" anchor="ctr"/>
+          <a:bodyPr wrap="none" lIns="0" tIns="0" rIns="0" bIns="0" rtlCol="0" anchor="ctr"/>
           <a:lstStyle/>
           <a:p>
             <a:pPr algn="ctr" indent="0" marL="0">
               <a:buNone/>
             </a:pPr>
             <a:r>
-              <a:rPr lang="ja-JP" altLang="en-US" sz="1100" dirty="0">
+              <a:rPr lang="ja-JP" altLang="en-US" sz="1050" dirty="0">
                 <a:solidFill>
                   <a:srgbClr val="404040"/>
                 </a:solidFill>
@@ -5870,7 +5870,7 @@
               </a:rPr>
               <a:t>まとめ</a:t>
             </a:r>
-            <a:endParaRPr lang="ja-JP" sz="1100" dirty="0"/>
+            <a:endParaRPr lang="ja-JP" sz="1050" dirty="0"/>
           </a:p>
         </p:txBody>
       </p:sp>
@@ -6640,7 +6640,7 @@
           </a:xfrm>
           <a:prstGeom prst="roundRect">
             <a:avLst>
-              <a:gd name="adj" fmla="val 15625"/>
+              <a:gd name="adj" fmla="val 7813"/>
             </a:avLst>
           </a:prstGeom>
           <a:solidFill>
@@ -6649,14 +6649,14 @@
           <a:ln/>
         </p:spPr>
         <p:txBody>
-          <a:bodyPr wrap="square" lIns="0" tIns="0" rIns="0" bIns="0" rtlCol="0" anchor="ctr"/>
+          <a:bodyPr wrap="none" lIns="0" tIns="0" rIns="0" bIns="0" rtlCol="0" anchor="ctr"/>
           <a:lstStyle/>
           <a:p>
             <a:pPr algn="ctr" indent="0" marL="0">
               <a:buNone/>
             </a:pPr>
             <a:r>
-              <a:rPr lang="ja-JP" altLang="en-US" sz="1100" dirty="0">
+              <a:rPr lang="ja-JP" altLang="en-US" sz="1050" dirty="0">
                 <a:solidFill>
                   <a:srgbClr val="404040"/>
                 </a:solidFill>
@@ -6666,7 +6666,7 @@
               </a:rPr>
               <a:t>順番</a:t>
             </a:r>
-            <a:endParaRPr lang="ja-JP" sz="1100" dirty="0"/>
+            <a:endParaRPr lang="ja-JP" sz="1050" dirty="0"/>
           </a:p>
         </p:txBody>
       </p:sp>
@@ -6683,7 +6683,7 @@
           </a:xfrm>
           <a:prstGeom prst="roundRect">
             <a:avLst>
-              <a:gd name="adj" fmla="val 15625"/>
+              <a:gd name="adj" fmla="val 7813"/>
             </a:avLst>
           </a:prstGeom>
           <a:solidFill>
@@ -6692,14 +6692,14 @@
           <a:ln/>
         </p:spPr>
         <p:txBody>
-          <a:bodyPr wrap="square" lIns="0" tIns="0" rIns="0" bIns="0" rtlCol="0" anchor="ctr"/>
+          <a:bodyPr wrap="none" lIns="0" tIns="0" rIns="0" bIns="0" rtlCol="0" anchor="ctr"/>
           <a:lstStyle/>
           <a:p>
             <a:pPr algn="ctr" indent="0" marL="0">
               <a:buNone/>
             </a:pPr>
             <a:r>
-              <a:rPr lang="ja-JP" altLang="en-US" sz="1100" b="1" dirty="0">
+              <a:rPr lang="ja-JP" altLang="en-US" sz="1050" b="1" dirty="0">
                 <a:solidFill>
                   <a:srgbClr val="FFFFFF"/>
                 </a:solidFill>
@@ -6709,14 +6709,14 @@
               </a:rPr>
               <a:t>消える・</a:t>
             </a:r>
-            <a:endParaRPr lang="ja-JP" sz="1100" dirty="0"/>
+            <a:endParaRPr lang="ja-JP" sz="1050" dirty="0"/>
           </a:p>
           <a:p>
             <a:pPr algn="ctr" indent="0" marL="0">
               <a:buNone/>
             </a:pPr>
             <a:r>
-              <a:rPr lang="ja-JP" altLang="en-US" sz="1100" b="1" dirty="0">
+              <a:rPr lang="ja-JP" altLang="en-US" sz="1050" b="1" dirty="0">
                 <a:solidFill>
                   <a:srgbClr val="FFFFFF"/>
                 </a:solidFill>
@@ -6726,7 +6726,7 @@
               </a:rPr>
               <a:t>下がる</a:t>
             </a:r>
-            <a:endParaRPr lang="ja-JP" sz="1100" dirty="0"/>
+            <a:endParaRPr lang="ja-JP" sz="1050" dirty="0"/>
           </a:p>
         </p:txBody>
       </p:sp>
@@ -6743,7 +6743,7 @@
           </a:xfrm>
           <a:prstGeom prst="roundRect">
             <a:avLst>
-              <a:gd name="adj" fmla="val 15625"/>
+              <a:gd name="adj" fmla="val 7813"/>
             </a:avLst>
           </a:prstGeom>
           <a:solidFill>
@@ -6752,14 +6752,14 @@
           <a:ln/>
         </p:spPr>
         <p:txBody>
-          <a:bodyPr wrap="square" lIns="0" tIns="0" rIns="0" bIns="0" rtlCol="0" anchor="ctr"/>
+          <a:bodyPr wrap="none" lIns="0" tIns="0" rIns="0" bIns="0" rtlCol="0" anchor="ctr"/>
           <a:lstStyle/>
           <a:p>
             <a:pPr algn="ctr" indent="0" marL="0">
               <a:buNone/>
             </a:pPr>
             <a:r>
-              <a:rPr lang="ja-JP" altLang="en-US" sz="1100" dirty="0">
+              <a:rPr lang="ja-JP" altLang="en-US" sz="1050" dirty="0">
                 <a:solidFill>
                   <a:srgbClr val="404040"/>
                 </a:solidFill>
@@ -6769,7 +6769,7 @@
               </a:rPr>
               <a:t>上がる</a:t>
             </a:r>
-            <a:endParaRPr lang="ja-JP" sz="1100" dirty="0"/>
+            <a:endParaRPr lang="ja-JP" sz="1050" dirty="0"/>
           </a:p>
         </p:txBody>
       </p:sp>
@@ -6786,7 +6786,7 @@
           </a:xfrm>
           <a:prstGeom prst="roundRect">
             <a:avLst>
-              <a:gd name="adj" fmla="val 15625"/>
+              <a:gd name="adj" fmla="val 7813"/>
             </a:avLst>
           </a:prstGeom>
           <a:solidFill>
@@ -6795,14 +6795,14 @@
           <a:ln/>
         </p:spPr>
         <p:txBody>
-          <a:bodyPr wrap="square" lIns="0" tIns="0" rIns="0" bIns="0" rtlCol="0" anchor="ctr"/>
+          <a:bodyPr wrap="none" lIns="0" tIns="0" rIns="0" bIns="0" rtlCol="0" anchor="ctr"/>
           <a:lstStyle/>
           <a:p>
             <a:pPr algn="ctr" indent="0" marL="0">
               <a:buNone/>
             </a:pPr>
             <a:r>
-              <a:rPr lang="ja-JP" altLang="en-US" sz="1100" dirty="0">
+              <a:rPr lang="ja-JP" altLang="en-US" sz="1050" dirty="0">
                 <a:solidFill>
                   <a:srgbClr val="404040"/>
                 </a:solidFill>
@@ -6812,7 +6812,7 @@
               </a:rPr>
               <a:t>形</a:t>
             </a:r>
-            <a:endParaRPr lang="ja-JP" sz="1100" dirty="0"/>
+            <a:endParaRPr lang="ja-JP" sz="1050" dirty="0"/>
           </a:p>
         </p:txBody>
       </p:sp>
@@ -6829,7 +6829,7 @@
           </a:xfrm>
           <a:prstGeom prst="roundRect">
             <a:avLst>
-              <a:gd name="adj" fmla="val 15625"/>
+              <a:gd name="adj" fmla="val 7813"/>
             </a:avLst>
           </a:prstGeom>
           <a:solidFill>
@@ -6838,14 +6838,14 @@
           <a:ln/>
         </p:spPr>
         <p:txBody>
-          <a:bodyPr wrap="square" lIns="0" tIns="0" rIns="0" bIns="0" rtlCol="0" anchor="ctr"/>
+          <a:bodyPr wrap="none" lIns="0" tIns="0" rIns="0" bIns="0" rtlCol="0" anchor="ctr"/>
           <a:lstStyle/>
           <a:p>
             <a:pPr algn="ctr" indent="0" marL="0">
               <a:buNone/>
             </a:pPr>
             <a:r>
-              <a:rPr lang="ja-JP" altLang="en-US" sz="1100" dirty="0">
+              <a:rPr lang="ja-JP" altLang="en-US" sz="1050" dirty="0">
                 <a:solidFill>
                   <a:srgbClr val="404040"/>
                 </a:solidFill>
@@ -6855,7 +6855,7 @@
               </a:rPr>
               <a:t>まとめ</a:t>
             </a:r>
-            <a:endParaRPr lang="ja-JP" sz="1100" dirty="0"/>
+            <a:endParaRPr lang="ja-JP" sz="1050" dirty="0"/>
           </a:p>
         </p:txBody>
       </p:sp>
@@ -7691,7 +7691,7 @@
           </a:xfrm>
           <a:prstGeom prst="roundRect">
             <a:avLst>
-              <a:gd name="adj" fmla="val 15625"/>
+              <a:gd name="adj" fmla="val 7813"/>
             </a:avLst>
           </a:prstGeom>
           <a:solidFill>
@@ -7700,14 +7700,14 @@
           <a:ln/>
         </p:spPr>
         <p:txBody>
-          <a:bodyPr wrap="square" lIns="0" tIns="0" rIns="0" bIns="0" rtlCol="0" anchor="ctr"/>
+          <a:bodyPr wrap="none" lIns="0" tIns="0" rIns="0" bIns="0" rtlCol="0" anchor="ctr"/>
           <a:lstStyle/>
           <a:p>
             <a:pPr algn="ctr" indent="0" marL="0">
               <a:buNone/>
             </a:pPr>
             <a:r>
-              <a:rPr lang="ja-JP" altLang="en-US" sz="1100" dirty="0">
+              <a:rPr lang="ja-JP" altLang="en-US" sz="1050" dirty="0">
                 <a:solidFill>
                   <a:srgbClr val="404040"/>
                 </a:solidFill>
@@ -7717,7 +7717,7 @@
               </a:rPr>
               <a:t>順番</a:t>
             </a:r>
-            <a:endParaRPr lang="ja-JP" sz="1100" dirty="0"/>
+            <a:endParaRPr lang="ja-JP" sz="1050" dirty="0"/>
           </a:p>
         </p:txBody>
       </p:sp>
@@ -7734,7 +7734,7 @@
           </a:xfrm>
           <a:prstGeom prst="roundRect">
             <a:avLst>
-              <a:gd name="adj" fmla="val 15625"/>
+              <a:gd name="adj" fmla="val 7813"/>
             </a:avLst>
           </a:prstGeom>
           <a:solidFill>
@@ -7743,14 +7743,14 @@
           <a:ln/>
         </p:spPr>
         <p:txBody>
-          <a:bodyPr wrap="square" lIns="0" tIns="0" rIns="0" bIns="0" rtlCol="0" anchor="ctr"/>
+          <a:bodyPr wrap="none" lIns="0" tIns="0" rIns="0" bIns="0" rtlCol="0" anchor="ctr"/>
           <a:lstStyle/>
           <a:p>
             <a:pPr algn="ctr" indent="0" marL="0">
               <a:buNone/>
             </a:pPr>
             <a:r>
-              <a:rPr lang="ja-JP" altLang="en-US" sz="1100" b="1" dirty="0">
+              <a:rPr lang="ja-JP" altLang="en-US" sz="1050" b="1" dirty="0">
                 <a:solidFill>
                   <a:srgbClr val="FFFFFF"/>
                 </a:solidFill>
@@ -7760,14 +7760,14 @@
               </a:rPr>
               <a:t>消える・</a:t>
             </a:r>
-            <a:endParaRPr lang="ja-JP" sz="1100" dirty="0"/>
+            <a:endParaRPr lang="ja-JP" sz="1050" dirty="0"/>
           </a:p>
           <a:p>
             <a:pPr algn="ctr" indent="0" marL="0">
               <a:buNone/>
             </a:pPr>
             <a:r>
-              <a:rPr lang="ja-JP" altLang="en-US" sz="1100" b="1" dirty="0">
+              <a:rPr lang="ja-JP" altLang="en-US" sz="1050" b="1" dirty="0">
                 <a:solidFill>
                   <a:srgbClr val="FFFFFF"/>
                 </a:solidFill>
@@ -7777,7 +7777,7 @@
               </a:rPr>
               <a:t>下がる</a:t>
             </a:r>
-            <a:endParaRPr lang="ja-JP" sz="1100" dirty="0"/>
+            <a:endParaRPr lang="ja-JP" sz="1050" dirty="0"/>
           </a:p>
         </p:txBody>
       </p:sp>
@@ -7794,7 +7794,7 @@
           </a:xfrm>
           <a:prstGeom prst="roundRect">
             <a:avLst>
-              <a:gd name="adj" fmla="val 15625"/>
+              <a:gd name="adj" fmla="val 7813"/>
             </a:avLst>
           </a:prstGeom>
           <a:solidFill>
@@ -7803,14 +7803,14 @@
           <a:ln/>
         </p:spPr>
         <p:txBody>
-          <a:bodyPr wrap="square" lIns="0" tIns="0" rIns="0" bIns="0" rtlCol="0" anchor="ctr"/>
+          <a:bodyPr wrap="none" lIns="0" tIns="0" rIns="0" bIns="0" rtlCol="0" anchor="ctr"/>
           <a:lstStyle/>
           <a:p>
             <a:pPr algn="ctr" indent="0" marL="0">
               <a:buNone/>
             </a:pPr>
             <a:r>
-              <a:rPr lang="ja-JP" altLang="en-US" sz="1100" dirty="0">
+              <a:rPr lang="ja-JP" altLang="en-US" sz="1050" dirty="0">
                 <a:solidFill>
                   <a:srgbClr val="404040"/>
                 </a:solidFill>
@@ -7820,7 +7820,7 @@
               </a:rPr>
               <a:t>上がる</a:t>
             </a:r>
-            <a:endParaRPr lang="ja-JP" sz="1100" dirty="0"/>
+            <a:endParaRPr lang="ja-JP" sz="1050" dirty="0"/>
           </a:p>
         </p:txBody>
       </p:sp>
@@ -7837,7 +7837,7 @@
           </a:xfrm>
           <a:prstGeom prst="roundRect">
             <a:avLst>
-              <a:gd name="adj" fmla="val 15625"/>
+              <a:gd name="adj" fmla="val 7813"/>
             </a:avLst>
           </a:prstGeom>
           <a:solidFill>
@@ -7846,14 +7846,14 @@
           <a:ln/>
         </p:spPr>
         <p:txBody>
-          <a:bodyPr wrap="square" lIns="0" tIns="0" rIns="0" bIns="0" rtlCol="0" anchor="ctr"/>
+          <a:bodyPr wrap="none" lIns="0" tIns="0" rIns="0" bIns="0" rtlCol="0" anchor="ctr"/>
           <a:lstStyle/>
           <a:p>
             <a:pPr algn="ctr" indent="0" marL="0">
               <a:buNone/>
             </a:pPr>
             <a:r>
-              <a:rPr lang="ja-JP" altLang="en-US" sz="1100" dirty="0">
+              <a:rPr lang="ja-JP" altLang="en-US" sz="1050" dirty="0">
                 <a:solidFill>
                   <a:srgbClr val="404040"/>
                 </a:solidFill>
@@ -7863,7 +7863,7 @@
               </a:rPr>
               <a:t>形</a:t>
             </a:r>
-            <a:endParaRPr lang="ja-JP" sz="1100" dirty="0"/>
+            <a:endParaRPr lang="ja-JP" sz="1050" dirty="0"/>
           </a:p>
         </p:txBody>
       </p:sp>
@@ -7880,7 +7880,7 @@
           </a:xfrm>
           <a:prstGeom prst="roundRect">
             <a:avLst>
-              <a:gd name="adj" fmla="val 15625"/>
+              <a:gd name="adj" fmla="val 7813"/>
             </a:avLst>
           </a:prstGeom>
           <a:solidFill>
@@ -7889,14 +7889,14 @@
           <a:ln/>
         </p:spPr>
         <p:txBody>
-          <a:bodyPr wrap="square" lIns="0" tIns="0" rIns="0" bIns="0" rtlCol="0" anchor="ctr"/>
+          <a:bodyPr wrap="none" lIns="0" tIns="0" rIns="0" bIns="0" rtlCol="0" anchor="ctr"/>
           <a:lstStyle/>
           <a:p>
             <a:pPr algn="ctr" indent="0" marL="0">
               <a:buNone/>
             </a:pPr>
             <a:r>
-              <a:rPr lang="ja-JP" altLang="en-US" sz="1100" dirty="0">
+              <a:rPr lang="ja-JP" altLang="en-US" sz="1050" dirty="0">
                 <a:solidFill>
                   <a:srgbClr val="404040"/>
                 </a:solidFill>
@@ -7906,7 +7906,7 @@
               </a:rPr>
               <a:t>まとめ</a:t>
             </a:r>
-            <a:endParaRPr lang="ja-JP" sz="1100" dirty="0"/>
+            <a:endParaRPr lang="ja-JP" sz="1050" dirty="0"/>
           </a:p>
         </p:txBody>
       </p:sp>
@@ -8666,7 +8666,7 @@
           </a:xfrm>
           <a:prstGeom prst="roundRect">
             <a:avLst>
-              <a:gd name="adj" fmla="val 15625"/>
+              <a:gd name="adj" fmla="val 7813"/>
             </a:avLst>
           </a:prstGeom>
           <a:solidFill>
@@ -8675,14 +8675,14 @@
           <a:ln/>
         </p:spPr>
         <p:txBody>
-          <a:bodyPr wrap="square" lIns="0" tIns="0" rIns="0" bIns="0" rtlCol="0" anchor="ctr"/>
+          <a:bodyPr wrap="none" lIns="0" tIns="0" rIns="0" bIns="0" rtlCol="0" anchor="ctr"/>
           <a:lstStyle/>
           <a:p>
             <a:pPr algn="ctr" indent="0" marL="0">
               <a:buNone/>
             </a:pPr>
             <a:r>
-              <a:rPr lang="ja-JP" altLang="en-US" sz="1100" dirty="0">
+              <a:rPr lang="ja-JP" altLang="en-US" sz="1050" dirty="0">
                 <a:solidFill>
                   <a:srgbClr val="404040"/>
                 </a:solidFill>
@@ -8692,7 +8692,7 @@
               </a:rPr>
               <a:t>順番</a:t>
             </a:r>
-            <a:endParaRPr lang="ja-JP" sz="1100" dirty="0"/>
+            <a:endParaRPr lang="ja-JP" sz="1050" dirty="0"/>
           </a:p>
         </p:txBody>
       </p:sp>
@@ -8709,7 +8709,7 @@
           </a:xfrm>
           <a:prstGeom prst="roundRect">
             <a:avLst>
-              <a:gd name="adj" fmla="val 15625"/>
+              <a:gd name="adj" fmla="val 7813"/>
             </a:avLst>
           </a:prstGeom>
           <a:solidFill>
@@ -8718,14 +8718,14 @@
           <a:ln/>
         </p:spPr>
         <p:txBody>
-          <a:bodyPr wrap="square" lIns="0" tIns="0" rIns="0" bIns="0" rtlCol="0" anchor="ctr"/>
+          <a:bodyPr wrap="none" lIns="0" tIns="0" rIns="0" bIns="0" rtlCol="0" anchor="ctr"/>
           <a:lstStyle/>
           <a:p>
             <a:pPr algn="ctr" indent="0" marL="0">
               <a:buNone/>
             </a:pPr>
             <a:r>
-              <a:rPr lang="ja-JP" altLang="en-US" sz="1100" dirty="0">
+              <a:rPr lang="ja-JP" altLang="en-US" sz="1050" dirty="0">
                 <a:solidFill>
                   <a:srgbClr val="404040"/>
                 </a:solidFill>
@@ -8735,14 +8735,14 @@
               </a:rPr>
               <a:t>消える・</a:t>
             </a:r>
-            <a:endParaRPr lang="ja-JP" sz="1100" dirty="0"/>
+            <a:endParaRPr lang="ja-JP" sz="1050" dirty="0"/>
           </a:p>
           <a:p>
             <a:pPr algn="ctr" indent="0" marL="0">
               <a:buNone/>
             </a:pPr>
             <a:r>
-              <a:rPr lang="ja-JP" altLang="en-US" sz="1100" dirty="0">
+              <a:rPr lang="ja-JP" altLang="en-US" sz="1050" dirty="0">
                 <a:solidFill>
                   <a:srgbClr val="404040"/>
                 </a:solidFill>
@@ -8752,7 +8752,7 @@
               </a:rPr>
               <a:t>下がる</a:t>
             </a:r>
-            <a:endParaRPr lang="ja-JP" sz="1100" dirty="0"/>
+            <a:endParaRPr lang="ja-JP" sz="1050" dirty="0"/>
           </a:p>
         </p:txBody>
       </p:sp>
@@ -8769,7 +8769,7 @@
           </a:xfrm>
           <a:prstGeom prst="roundRect">
             <a:avLst>
-              <a:gd name="adj" fmla="val 15625"/>
+              <a:gd name="adj" fmla="val 7813"/>
             </a:avLst>
           </a:prstGeom>
           <a:solidFill>
@@ -8778,14 +8778,14 @@
           <a:ln/>
         </p:spPr>
         <p:txBody>
-          <a:bodyPr wrap="square" lIns="0" tIns="0" rIns="0" bIns="0" rtlCol="0" anchor="ctr"/>
+          <a:bodyPr wrap="none" lIns="0" tIns="0" rIns="0" bIns="0" rtlCol="0" anchor="ctr"/>
           <a:lstStyle/>
           <a:p>
             <a:pPr algn="ctr" indent="0" marL="0">
               <a:buNone/>
             </a:pPr>
             <a:r>
-              <a:rPr lang="ja-JP" altLang="en-US" sz="1100" b="1" dirty="0">
+              <a:rPr lang="ja-JP" altLang="en-US" sz="1050" b="1" dirty="0">
                 <a:solidFill>
                   <a:srgbClr val="FFFFFF"/>
                 </a:solidFill>
@@ -8795,7 +8795,7 @@
               </a:rPr>
               <a:t>上がる</a:t>
             </a:r>
-            <a:endParaRPr lang="ja-JP" sz="1100" dirty="0"/>
+            <a:endParaRPr lang="ja-JP" sz="1050" dirty="0"/>
           </a:p>
         </p:txBody>
       </p:sp>
@@ -8812,7 +8812,7 @@
           </a:xfrm>
           <a:prstGeom prst="roundRect">
             <a:avLst>
-              <a:gd name="adj" fmla="val 15625"/>
+              <a:gd name="adj" fmla="val 7813"/>
             </a:avLst>
           </a:prstGeom>
           <a:solidFill>
@@ -8821,14 +8821,14 @@
           <a:ln/>
         </p:spPr>
         <p:txBody>
-          <a:bodyPr wrap="square" lIns="0" tIns="0" rIns="0" bIns="0" rtlCol="0" anchor="ctr"/>
+          <a:bodyPr wrap="none" lIns="0" tIns="0" rIns="0" bIns="0" rtlCol="0" anchor="ctr"/>
           <a:lstStyle/>
           <a:p>
             <a:pPr algn="ctr" indent="0" marL="0">
               <a:buNone/>
             </a:pPr>
             <a:r>
-              <a:rPr lang="ja-JP" altLang="en-US" sz="1100" dirty="0">
+              <a:rPr lang="ja-JP" altLang="en-US" sz="1050" dirty="0">
                 <a:solidFill>
                   <a:srgbClr val="404040"/>
                 </a:solidFill>
@@ -8838,7 +8838,7 @@
               </a:rPr>
               <a:t>形</a:t>
             </a:r>
-            <a:endParaRPr lang="ja-JP" sz="1100" dirty="0"/>
+            <a:endParaRPr lang="ja-JP" sz="1050" dirty="0"/>
           </a:p>
         </p:txBody>
       </p:sp>
@@ -8855,7 +8855,7 @@
           </a:xfrm>
           <a:prstGeom prst="roundRect">
             <a:avLst>
-              <a:gd name="adj" fmla="val 15625"/>
+              <a:gd name="adj" fmla="val 7813"/>
             </a:avLst>
           </a:prstGeom>
           <a:solidFill>
@@ -8864,14 +8864,14 @@
           <a:ln/>
         </p:spPr>
         <p:txBody>
-          <a:bodyPr wrap="square" lIns="0" tIns="0" rIns="0" bIns="0" rtlCol="0" anchor="ctr"/>
+          <a:bodyPr wrap="none" lIns="0" tIns="0" rIns="0" bIns="0" rtlCol="0" anchor="ctr"/>
           <a:lstStyle/>
           <a:p>
             <a:pPr algn="ctr" indent="0" marL="0">
               <a:buNone/>
             </a:pPr>
             <a:r>
-              <a:rPr lang="ja-JP" altLang="en-US" sz="1100" dirty="0">
+              <a:rPr lang="ja-JP" altLang="en-US" sz="1050" dirty="0">
                 <a:solidFill>
                   <a:srgbClr val="404040"/>
                 </a:solidFill>
@@ -8881,7 +8881,7 @@
               </a:rPr>
               <a:t>まとめ</a:t>
             </a:r>
-            <a:endParaRPr lang="ja-JP" sz="1100" dirty="0"/>
+            <a:endParaRPr lang="ja-JP" sz="1050" dirty="0"/>
           </a:p>
         </p:txBody>
       </p:sp>
@@ -9705,7 +9705,7 @@
           </a:xfrm>
           <a:prstGeom prst="roundRect">
             <a:avLst>
-              <a:gd name="adj" fmla="val 15625"/>
+              <a:gd name="adj" fmla="val 7813"/>
             </a:avLst>
           </a:prstGeom>
           <a:solidFill>
@@ -9714,14 +9714,14 @@
           <a:ln/>
         </p:spPr>
         <p:txBody>
-          <a:bodyPr wrap="square" lIns="0" tIns="0" rIns="0" bIns="0" rtlCol="0" anchor="ctr"/>
+          <a:bodyPr wrap="none" lIns="0" tIns="0" rIns="0" bIns="0" rtlCol="0" anchor="ctr"/>
           <a:lstStyle/>
           <a:p>
             <a:pPr algn="ctr" indent="0" marL="0">
               <a:buNone/>
             </a:pPr>
             <a:r>
-              <a:rPr lang="ja-JP" altLang="en-US" sz="1100" dirty="0">
+              <a:rPr lang="ja-JP" altLang="en-US" sz="1050" dirty="0">
                 <a:solidFill>
                   <a:srgbClr val="404040"/>
                 </a:solidFill>
@@ -9731,7 +9731,7 @@
               </a:rPr>
               <a:t>順番</a:t>
             </a:r>
-            <a:endParaRPr lang="ja-JP" sz="1100" dirty="0"/>
+            <a:endParaRPr lang="ja-JP" sz="1050" dirty="0"/>
           </a:p>
         </p:txBody>
       </p:sp>
@@ -9748,7 +9748,7 @@
           </a:xfrm>
           <a:prstGeom prst="roundRect">
             <a:avLst>
-              <a:gd name="adj" fmla="val 15625"/>
+              <a:gd name="adj" fmla="val 7813"/>
             </a:avLst>
           </a:prstGeom>
           <a:solidFill>
@@ -9757,14 +9757,14 @@
           <a:ln/>
         </p:spPr>
         <p:txBody>
-          <a:bodyPr wrap="square" lIns="0" tIns="0" rIns="0" bIns="0" rtlCol="0" anchor="ctr"/>
+          <a:bodyPr wrap="none" lIns="0" tIns="0" rIns="0" bIns="0" rtlCol="0" anchor="ctr"/>
           <a:lstStyle/>
           <a:p>
             <a:pPr algn="ctr" indent="0" marL="0">
               <a:buNone/>
             </a:pPr>
             <a:r>
-              <a:rPr lang="ja-JP" altLang="en-US" sz="1100" dirty="0">
+              <a:rPr lang="ja-JP" altLang="en-US" sz="1050" dirty="0">
                 <a:solidFill>
                   <a:srgbClr val="404040"/>
                 </a:solidFill>
@@ -9774,14 +9774,14 @@
               </a:rPr>
               <a:t>消える・</a:t>
             </a:r>
-            <a:endParaRPr lang="ja-JP" sz="1100" dirty="0"/>
+            <a:endParaRPr lang="ja-JP" sz="1050" dirty="0"/>
           </a:p>
           <a:p>
             <a:pPr algn="ctr" indent="0" marL="0">
               <a:buNone/>
             </a:pPr>
             <a:r>
-              <a:rPr lang="ja-JP" altLang="en-US" sz="1100" dirty="0">
+              <a:rPr lang="ja-JP" altLang="en-US" sz="1050" dirty="0">
                 <a:solidFill>
                   <a:srgbClr val="404040"/>
                 </a:solidFill>
@@ -9791,7 +9791,7 @@
               </a:rPr>
               <a:t>下がる</a:t>
             </a:r>
-            <a:endParaRPr lang="ja-JP" sz="1100" dirty="0"/>
+            <a:endParaRPr lang="ja-JP" sz="1050" dirty="0"/>
           </a:p>
         </p:txBody>
       </p:sp>
@@ -9808,7 +9808,7 @@
           </a:xfrm>
           <a:prstGeom prst="roundRect">
             <a:avLst>
-              <a:gd name="adj" fmla="val 15625"/>
+              <a:gd name="adj" fmla="val 7813"/>
             </a:avLst>
           </a:prstGeom>
           <a:solidFill>
@@ -9817,14 +9817,14 @@
           <a:ln/>
         </p:spPr>
         <p:txBody>
-          <a:bodyPr wrap="square" lIns="0" tIns="0" rIns="0" bIns="0" rtlCol="0" anchor="ctr"/>
+          <a:bodyPr wrap="none" lIns="0" tIns="0" rIns="0" bIns="0" rtlCol="0" anchor="ctr"/>
           <a:lstStyle/>
           <a:p>
             <a:pPr algn="ctr" indent="0" marL="0">
               <a:buNone/>
             </a:pPr>
             <a:r>
-              <a:rPr lang="ja-JP" altLang="en-US" sz="1100" b="1" dirty="0">
+              <a:rPr lang="ja-JP" altLang="en-US" sz="1050" b="1" dirty="0">
                 <a:solidFill>
                   <a:srgbClr val="FFFFFF"/>
                 </a:solidFill>
@@ -9834,7 +9834,7 @@
               </a:rPr>
               <a:t>上がる</a:t>
             </a:r>
-            <a:endParaRPr lang="ja-JP" sz="1100" dirty="0"/>
+            <a:endParaRPr lang="ja-JP" sz="1050" dirty="0"/>
           </a:p>
         </p:txBody>
       </p:sp>
@@ -9851,7 +9851,7 @@
           </a:xfrm>
           <a:prstGeom prst="roundRect">
             <a:avLst>
-              <a:gd name="adj" fmla="val 15625"/>
+              <a:gd name="adj" fmla="val 7813"/>
             </a:avLst>
           </a:prstGeom>
           <a:solidFill>
@@ -9860,14 +9860,14 @@
           <a:ln/>
         </p:spPr>
         <p:txBody>
-          <a:bodyPr wrap="square" lIns="0" tIns="0" rIns="0" bIns="0" rtlCol="0" anchor="ctr"/>
+          <a:bodyPr wrap="none" lIns="0" tIns="0" rIns="0" bIns="0" rtlCol="0" anchor="ctr"/>
           <a:lstStyle/>
           <a:p>
             <a:pPr algn="ctr" indent="0" marL="0">
               <a:buNone/>
             </a:pPr>
             <a:r>
-              <a:rPr lang="ja-JP" altLang="en-US" sz="1100" dirty="0">
+              <a:rPr lang="ja-JP" altLang="en-US" sz="1050" dirty="0">
                 <a:solidFill>
                   <a:srgbClr val="404040"/>
                 </a:solidFill>
@@ -9877,7 +9877,7 @@
               </a:rPr>
               <a:t>形</a:t>
             </a:r>
-            <a:endParaRPr lang="ja-JP" sz="1100" dirty="0"/>
+            <a:endParaRPr lang="ja-JP" sz="1050" dirty="0"/>
           </a:p>
         </p:txBody>
       </p:sp>
@@ -9894,7 +9894,7 @@
           </a:xfrm>
           <a:prstGeom prst="roundRect">
             <a:avLst>
-              <a:gd name="adj" fmla="val 15625"/>
+              <a:gd name="adj" fmla="val 7813"/>
             </a:avLst>
           </a:prstGeom>
           <a:solidFill>
@@ -9903,14 +9903,14 @@
           <a:ln/>
         </p:spPr>
         <p:txBody>
-          <a:bodyPr wrap="square" lIns="0" tIns="0" rIns="0" bIns="0" rtlCol="0" anchor="ctr"/>
+          <a:bodyPr wrap="none" lIns="0" tIns="0" rIns="0" bIns="0" rtlCol="0" anchor="ctr"/>
           <a:lstStyle/>
           <a:p>
             <a:pPr algn="ctr" indent="0" marL="0">
               <a:buNone/>
             </a:pPr>
             <a:r>
-              <a:rPr lang="ja-JP" altLang="en-US" sz="1100" dirty="0">
+              <a:rPr lang="ja-JP" altLang="en-US" sz="1050" dirty="0">
                 <a:solidFill>
                   <a:srgbClr val="404040"/>
                 </a:solidFill>
@@ -9920,7 +9920,7 @@
               </a:rPr>
               <a:t>まとめ</a:t>
             </a:r>
-            <a:endParaRPr lang="ja-JP" sz="1100" dirty="0"/>
+            <a:endParaRPr lang="ja-JP" sz="1050" dirty="0"/>
           </a:p>
         </p:txBody>
       </p:sp>
@@ -10735,7 +10735,7 @@
           </a:xfrm>
           <a:prstGeom prst="roundRect">
             <a:avLst>
-              <a:gd name="adj" fmla="val 15625"/>
+              <a:gd name="adj" fmla="val 7813"/>
             </a:avLst>
           </a:prstGeom>
           <a:solidFill>
@@ -10744,14 +10744,14 @@
           <a:ln/>
         </p:spPr>
         <p:txBody>
-          <a:bodyPr wrap="square" lIns="0" tIns="0" rIns="0" bIns="0" rtlCol="0" anchor="ctr"/>
+          <a:bodyPr wrap="none" lIns="0" tIns="0" rIns="0" bIns="0" rtlCol="0" anchor="ctr"/>
           <a:lstStyle/>
           <a:p>
             <a:pPr algn="ctr" indent="0" marL="0">
               <a:buNone/>
             </a:pPr>
             <a:r>
-              <a:rPr lang="ja-JP" altLang="en-US" sz="1100" dirty="0">
+              <a:rPr lang="ja-JP" altLang="en-US" sz="1050" dirty="0">
                 <a:solidFill>
                   <a:srgbClr val="404040"/>
                 </a:solidFill>
@@ -10761,7 +10761,7 @@
               </a:rPr>
               <a:t>順番</a:t>
             </a:r>
-            <a:endParaRPr lang="ja-JP" sz="1100" dirty="0"/>
+            <a:endParaRPr lang="ja-JP" sz="1050" dirty="0"/>
           </a:p>
         </p:txBody>
       </p:sp>
@@ -10778,7 +10778,7 @@
           </a:xfrm>
           <a:prstGeom prst="roundRect">
             <a:avLst>
-              <a:gd name="adj" fmla="val 15625"/>
+              <a:gd name="adj" fmla="val 7813"/>
             </a:avLst>
           </a:prstGeom>
           <a:solidFill>
@@ -10787,14 +10787,14 @@
           <a:ln/>
         </p:spPr>
         <p:txBody>
-          <a:bodyPr wrap="square" lIns="0" tIns="0" rIns="0" bIns="0" rtlCol="0" anchor="ctr"/>
+          <a:bodyPr wrap="none" lIns="0" tIns="0" rIns="0" bIns="0" rtlCol="0" anchor="ctr"/>
           <a:lstStyle/>
           <a:p>
             <a:pPr algn="ctr" indent="0" marL="0">
               <a:buNone/>
             </a:pPr>
             <a:r>
-              <a:rPr lang="ja-JP" altLang="en-US" sz="1100" dirty="0">
+              <a:rPr lang="ja-JP" altLang="en-US" sz="1050" dirty="0">
                 <a:solidFill>
                   <a:srgbClr val="404040"/>
                 </a:solidFill>
@@ -10804,14 +10804,14 @@
               </a:rPr>
               <a:t>消える・</a:t>
             </a:r>
-            <a:endParaRPr lang="ja-JP" sz="1100" dirty="0"/>
+            <a:endParaRPr lang="ja-JP" sz="1050" dirty="0"/>
           </a:p>
           <a:p>
             <a:pPr algn="ctr" indent="0" marL="0">
               <a:buNone/>
             </a:pPr>
             <a:r>
-              <a:rPr lang="ja-JP" altLang="en-US" sz="1100" dirty="0">
+              <a:rPr lang="ja-JP" altLang="en-US" sz="1050" dirty="0">
                 <a:solidFill>
                   <a:srgbClr val="404040"/>
                 </a:solidFill>
@@ -10821,7 +10821,7 @@
               </a:rPr>
               <a:t>下がる</a:t>
             </a:r>
-            <a:endParaRPr lang="ja-JP" sz="1100" dirty="0"/>
+            <a:endParaRPr lang="ja-JP" sz="1050" dirty="0"/>
           </a:p>
         </p:txBody>
       </p:sp>
@@ -10838,7 +10838,7 @@
           </a:xfrm>
           <a:prstGeom prst="roundRect">
             <a:avLst>
-              <a:gd name="adj" fmla="val 15625"/>
+              <a:gd name="adj" fmla="val 7813"/>
             </a:avLst>
           </a:prstGeom>
           <a:solidFill>
@@ -10847,14 +10847,14 @@
           <a:ln/>
         </p:spPr>
         <p:txBody>
-          <a:bodyPr wrap="square" lIns="0" tIns="0" rIns="0" bIns="0" rtlCol="0" anchor="ctr"/>
+          <a:bodyPr wrap="none" lIns="0" tIns="0" rIns="0" bIns="0" rtlCol="0" anchor="ctr"/>
           <a:lstStyle/>
           <a:p>
             <a:pPr algn="ctr" indent="0" marL="0">
               <a:buNone/>
             </a:pPr>
             <a:r>
-              <a:rPr lang="ja-JP" altLang="en-US" sz="1100" dirty="0">
+              <a:rPr lang="ja-JP" altLang="en-US" sz="1050" dirty="0">
                 <a:solidFill>
                   <a:srgbClr val="404040"/>
                 </a:solidFill>
@@ -10864,7 +10864,7 @@
               </a:rPr>
               <a:t>上がる</a:t>
             </a:r>
-            <a:endParaRPr lang="ja-JP" sz="1100" dirty="0"/>
+            <a:endParaRPr lang="ja-JP" sz="1050" dirty="0"/>
           </a:p>
         </p:txBody>
       </p:sp>
@@ -10881,7 +10881,7 @@
           </a:xfrm>
           <a:prstGeom prst="roundRect">
             <a:avLst>
-              <a:gd name="adj" fmla="val 15625"/>
+              <a:gd name="adj" fmla="val 7813"/>
             </a:avLst>
           </a:prstGeom>
           <a:solidFill>
@@ -10890,14 +10890,14 @@
           <a:ln/>
         </p:spPr>
         <p:txBody>
-          <a:bodyPr wrap="square" lIns="0" tIns="0" rIns="0" bIns="0" rtlCol="0" anchor="ctr"/>
+          <a:bodyPr wrap="none" lIns="0" tIns="0" rIns="0" bIns="0" rtlCol="0" anchor="ctr"/>
           <a:lstStyle/>
           <a:p>
             <a:pPr algn="ctr" indent="0" marL="0">
               <a:buNone/>
             </a:pPr>
             <a:r>
-              <a:rPr lang="ja-JP" altLang="en-US" sz="1100" b="1" dirty="0">
+              <a:rPr lang="ja-JP" altLang="en-US" sz="1050" b="1" dirty="0">
                 <a:solidFill>
                   <a:srgbClr val="FFFFFF"/>
                 </a:solidFill>
@@ -10907,7 +10907,7 @@
               </a:rPr>
               <a:t>形</a:t>
             </a:r>
-            <a:endParaRPr lang="ja-JP" sz="1100" dirty="0"/>
+            <a:endParaRPr lang="ja-JP" sz="1050" dirty="0"/>
           </a:p>
         </p:txBody>
       </p:sp>
@@ -10924,7 +10924,7 @@
           </a:xfrm>
           <a:prstGeom prst="roundRect">
             <a:avLst>
-              <a:gd name="adj" fmla="val 15625"/>
+              <a:gd name="adj" fmla="val 7813"/>
             </a:avLst>
           </a:prstGeom>
           <a:solidFill>
@@ -10933,14 +10933,14 @@
           <a:ln/>
         </p:spPr>
         <p:txBody>
-          <a:bodyPr wrap="square" lIns="0" tIns="0" rIns="0" bIns="0" rtlCol="0" anchor="ctr"/>
+          <a:bodyPr wrap="none" lIns="0" tIns="0" rIns="0" bIns="0" rtlCol="0" anchor="ctr"/>
           <a:lstStyle/>
           <a:p>
             <a:pPr algn="ctr" indent="0" marL="0">
               <a:buNone/>
             </a:pPr>
             <a:r>
-              <a:rPr lang="ja-JP" altLang="en-US" sz="1100" dirty="0">
+              <a:rPr lang="ja-JP" altLang="en-US" sz="1050" dirty="0">
                 <a:solidFill>
                   <a:srgbClr val="404040"/>
                 </a:solidFill>
@@ -10950,7 +10950,7 @@
               </a:rPr>
               <a:t>まとめ</a:t>
             </a:r>
-            <a:endParaRPr lang="ja-JP" sz="1100" dirty="0"/>
+            <a:endParaRPr lang="ja-JP" sz="1050" dirty="0"/>
           </a:p>
         </p:txBody>
       </p:sp>
@@ -11756,7 +11756,7 @@
           </a:xfrm>
           <a:prstGeom prst="roundRect">
             <a:avLst>
-              <a:gd name="adj" fmla="val 15625"/>
+              <a:gd name="adj" fmla="val 7813"/>
             </a:avLst>
           </a:prstGeom>
           <a:solidFill>
@@ -11765,14 +11765,14 @@
           <a:ln/>
         </p:spPr>
         <p:txBody>
-          <a:bodyPr wrap="square" lIns="0" tIns="0" rIns="0" bIns="0" rtlCol="0" anchor="ctr"/>
+          <a:bodyPr wrap="none" lIns="0" tIns="0" rIns="0" bIns="0" rtlCol="0" anchor="ctr"/>
           <a:lstStyle/>
           <a:p>
             <a:pPr algn="ctr" indent="0" marL="0">
               <a:buNone/>
             </a:pPr>
             <a:r>
-              <a:rPr lang="ja-JP" altLang="en-US" sz="1100" dirty="0">
+              <a:rPr lang="ja-JP" altLang="en-US" sz="1050" dirty="0">
                 <a:solidFill>
                   <a:srgbClr val="404040"/>
                 </a:solidFill>
@@ -11782,7 +11782,7 @@
               </a:rPr>
               <a:t>順番</a:t>
             </a:r>
-            <a:endParaRPr lang="ja-JP" sz="1100" dirty="0"/>
+            <a:endParaRPr lang="ja-JP" sz="1050" dirty="0"/>
           </a:p>
         </p:txBody>
       </p:sp>
@@ -11799,7 +11799,7 @@
           </a:xfrm>
           <a:prstGeom prst="roundRect">
             <a:avLst>
-              <a:gd name="adj" fmla="val 15625"/>
+              <a:gd name="adj" fmla="val 7813"/>
             </a:avLst>
           </a:prstGeom>
           <a:solidFill>
@@ -11808,14 +11808,14 @@
           <a:ln/>
         </p:spPr>
         <p:txBody>
-          <a:bodyPr wrap="square" lIns="0" tIns="0" rIns="0" bIns="0" rtlCol="0" anchor="ctr"/>
+          <a:bodyPr wrap="none" lIns="0" tIns="0" rIns="0" bIns="0" rtlCol="0" anchor="ctr"/>
           <a:lstStyle/>
           <a:p>
             <a:pPr algn="ctr" indent="0" marL="0">
               <a:buNone/>
             </a:pPr>
             <a:r>
-              <a:rPr lang="ja-JP" altLang="en-US" sz="1100" dirty="0">
+              <a:rPr lang="ja-JP" altLang="en-US" sz="1050" dirty="0">
                 <a:solidFill>
                   <a:srgbClr val="404040"/>
                 </a:solidFill>
@@ -11825,14 +11825,14 @@
               </a:rPr>
               <a:t>消える・</a:t>
             </a:r>
-            <a:endParaRPr lang="ja-JP" sz="1100" dirty="0"/>
+            <a:endParaRPr lang="ja-JP" sz="1050" dirty="0"/>
           </a:p>
           <a:p>
             <a:pPr algn="ctr" indent="0" marL="0">
               <a:buNone/>
             </a:pPr>
             <a:r>
-              <a:rPr lang="ja-JP" altLang="en-US" sz="1100" dirty="0">
+              <a:rPr lang="ja-JP" altLang="en-US" sz="1050" dirty="0">
                 <a:solidFill>
                   <a:srgbClr val="404040"/>
                 </a:solidFill>
@@ -11842,7 +11842,7 @@
               </a:rPr>
               <a:t>下がる</a:t>
             </a:r>
-            <a:endParaRPr lang="ja-JP" sz="1100" dirty="0"/>
+            <a:endParaRPr lang="ja-JP" sz="1050" dirty="0"/>
           </a:p>
         </p:txBody>
       </p:sp>
@@ -11859,7 +11859,7 @@
           </a:xfrm>
           <a:prstGeom prst="roundRect">
             <a:avLst>
-              <a:gd name="adj" fmla="val 15625"/>
+              <a:gd name="adj" fmla="val 7813"/>
             </a:avLst>
           </a:prstGeom>
           <a:solidFill>
@@ -11868,14 +11868,14 @@
           <a:ln/>
         </p:spPr>
         <p:txBody>
-          <a:bodyPr wrap="square" lIns="0" tIns="0" rIns="0" bIns="0" rtlCol="0" anchor="ctr"/>
+          <a:bodyPr wrap="none" lIns="0" tIns="0" rIns="0" bIns="0" rtlCol="0" anchor="ctr"/>
           <a:lstStyle/>
           <a:p>
             <a:pPr algn="ctr" indent="0" marL="0">
               <a:buNone/>
             </a:pPr>
             <a:r>
-              <a:rPr lang="ja-JP" altLang="en-US" sz="1100" dirty="0">
+              <a:rPr lang="ja-JP" altLang="en-US" sz="1050" dirty="0">
                 <a:solidFill>
                   <a:srgbClr val="404040"/>
                 </a:solidFill>
@@ -11885,7 +11885,7 @@
               </a:rPr>
               <a:t>上がる</a:t>
             </a:r>
-            <a:endParaRPr lang="ja-JP" sz="1100" dirty="0"/>
+            <a:endParaRPr lang="ja-JP" sz="1050" dirty="0"/>
           </a:p>
         </p:txBody>
       </p:sp>
@@ -11902,7 +11902,7 @@
           </a:xfrm>
           <a:prstGeom prst="roundRect">
             <a:avLst>
-              <a:gd name="adj" fmla="val 15625"/>
+              <a:gd name="adj" fmla="val 7813"/>
             </a:avLst>
           </a:prstGeom>
           <a:solidFill>
@@ -11911,14 +11911,14 @@
           <a:ln/>
         </p:spPr>
         <p:txBody>
-          <a:bodyPr wrap="square" lIns="0" tIns="0" rIns="0" bIns="0" rtlCol="0" anchor="ctr"/>
+          <a:bodyPr wrap="none" lIns="0" tIns="0" rIns="0" bIns="0" rtlCol="0" anchor="ctr"/>
           <a:lstStyle/>
           <a:p>
             <a:pPr algn="ctr" indent="0" marL="0">
               <a:buNone/>
             </a:pPr>
             <a:r>
-              <a:rPr lang="ja-JP" altLang="en-US" sz="1100" b="1" dirty="0">
+              <a:rPr lang="ja-JP" altLang="en-US" sz="1050" b="1" dirty="0">
                 <a:solidFill>
                   <a:srgbClr val="FFFFFF"/>
                 </a:solidFill>
@@ -11928,7 +11928,7 @@
               </a:rPr>
               <a:t>形</a:t>
             </a:r>
-            <a:endParaRPr lang="ja-JP" sz="1100" dirty="0"/>
+            <a:endParaRPr lang="ja-JP" sz="1050" dirty="0"/>
           </a:p>
         </p:txBody>
       </p:sp>
@@ -11945,7 +11945,7 @@
           </a:xfrm>
           <a:prstGeom prst="roundRect">
             <a:avLst>
-              <a:gd name="adj" fmla="val 15625"/>
+              <a:gd name="adj" fmla="val 7813"/>
             </a:avLst>
           </a:prstGeom>
           <a:solidFill>
@@ -11954,14 +11954,14 @@
           <a:ln/>
         </p:spPr>
         <p:txBody>
-          <a:bodyPr wrap="square" lIns="0" tIns="0" rIns="0" bIns="0" rtlCol="0" anchor="ctr"/>
+          <a:bodyPr wrap="none" lIns="0" tIns="0" rIns="0" bIns="0" rtlCol="0" anchor="ctr"/>
           <a:lstStyle/>
           <a:p>
             <a:pPr algn="ctr" indent="0" marL="0">
               <a:buNone/>
             </a:pPr>
             <a:r>
-              <a:rPr lang="ja-JP" altLang="en-US" sz="1100" dirty="0">
+              <a:rPr lang="ja-JP" altLang="en-US" sz="1050" dirty="0">
                 <a:solidFill>
                   <a:srgbClr val="404040"/>
                 </a:solidFill>
@@ -11971,7 +11971,7 @@
               </a:rPr>
               <a:t>まとめ</a:t>
             </a:r>
-            <a:endParaRPr lang="ja-JP" sz="1100" dirty="0"/>
+            <a:endParaRPr lang="ja-JP" sz="1050" dirty="0"/>
           </a:p>
         </p:txBody>
       </p:sp>
